--- a/documents/NeuroWatch.pptx
+++ b/documents/NeuroWatch.pptx
@@ -210,7 +210,7 @@
           <a:p>
             <a:fld id="{4584CAE8-38D5-461C-80C4-1AF2B758DADD}" type="datetimeFigureOut">
               <a:rPr lang="en-IN" smtClean="0"/>
-              <a:t>28-03-2026</a:t>
+              <a:t>25-04-2026</a:t>
             </a:fld>
             <a:endParaRPr lang="en-IN"/>
           </a:p>
@@ -4316,7 +4316,7 @@
           <a:p>
             <a:fld id="{5BCAD085-E8A6-8845-BD4E-CB4CCA059FC4}" type="datetimeFigureOut">
               <a:rPr lang="en-US" smtClean="0"/>
-              <a:t>3/28/2026</a:t>
+              <a:t>4/25/2026</a:t>
             </a:fld>
             <a:endParaRPr lang="en-US"/>
           </a:p>
@@ -13421,7 +13421,7 @@
           <p:nvPr>
             <p:extLst>
               <p:ext uri="{D42A27DB-BD31-4B8C-83A1-F6EECF244321}">
-                <p14:modId xmlns:p14="http://schemas.microsoft.com/office/powerpoint/2010/main" val="844998746"/>
+                <p14:modId xmlns:p14="http://schemas.microsoft.com/office/powerpoint/2010/main" val="230429889"/>
               </p:ext>
             </p:extLst>
           </p:nvPr>
@@ -13569,7 +13569,7 @@
                           <a:latin typeface="Times New Roman" panose="02020603050405020304" pitchFamily="18" charset="0"/>
                           <a:cs typeface="Times New Roman" panose="02020603050405020304" pitchFamily="18" charset="0"/>
                         </a:rPr>
-                        <a:t>Marketing Lead</a:t>
+                        <a:t>Market Analyst</a:t>
                       </a:r>
                       <a:endParaRPr lang="en-IN" sz="1600" dirty="0">
                         <a:latin typeface="Times New Roman" panose="02020603050405020304" pitchFamily="18" charset="0"/>
@@ -13624,7 +13624,40 @@
                           <a:latin typeface="Times New Roman" panose="02020603050405020304" pitchFamily="18" charset="0"/>
                           <a:cs typeface="Times New Roman" panose="02020603050405020304" pitchFamily="18" charset="0"/>
                         </a:rPr>
-                        <a:t>Customer Contact Lead</a:t>
+                        <a:t>U</a:t>
+                      </a:r>
+                      <a:r>
+                        <a:rPr lang="en-US" sz="1600" b="0" i="0" u="none" strike="noStrike">
+                          <a:solidFill>
+                            <a:srgbClr val="000000"/>
+                          </a:solidFill>
+                          <a:effectLst/>
+                          <a:latin typeface="Times New Roman" panose="02020603050405020304" pitchFamily="18" charset="0"/>
+                          <a:cs typeface="Times New Roman" panose="02020603050405020304" pitchFamily="18" charset="0"/>
+                        </a:rPr>
+                        <a:t>ser </a:t>
+                      </a:r>
+                      <a:r>
+                        <a:rPr lang="en-US" sz="1600" b="0" i="0" u="none" strike="noStrike" dirty="0">
+                          <a:solidFill>
+                            <a:srgbClr val="000000"/>
+                          </a:solidFill>
+                          <a:effectLst/>
+                          <a:latin typeface="Times New Roman" panose="02020603050405020304" pitchFamily="18" charset="0"/>
+                          <a:cs typeface="Times New Roman" panose="02020603050405020304" pitchFamily="18" charset="0"/>
+                        </a:rPr>
+                        <a:t>Research </a:t>
+                      </a:r>
+                      <a:r>
+                        <a:rPr lang="en-US" sz="1600" b="0" i="0" u="none" strike="noStrike">
+                          <a:solidFill>
+                            <a:srgbClr val="000000"/>
+                          </a:solidFill>
+                          <a:effectLst/>
+                          <a:latin typeface="Times New Roman" panose="02020603050405020304" pitchFamily="18" charset="0"/>
+                          <a:cs typeface="Times New Roman" panose="02020603050405020304" pitchFamily="18" charset="0"/>
+                        </a:rPr>
+                        <a:t>&amp; Feedback</a:t>
                       </a:r>
                       <a:endParaRPr lang="en-IN" sz="1600" b="0" i="0" u="none" strike="noStrike" dirty="0">
                         <a:solidFill>
@@ -13726,7 +13759,7 @@
                           <a:latin typeface="Times New Roman" panose="02020603050405020304" pitchFamily="18" charset="0"/>
                           <a:cs typeface="Times New Roman" panose="02020603050405020304" pitchFamily="18" charset="0"/>
                         </a:rPr>
-                        <a:t>Testing Lead</a:t>
+                        <a:t>Testing</a:t>
                       </a:r>
                       <a:endParaRPr lang="en-IN" sz="1600" dirty="0">
                         <a:latin typeface="Times New Roman" panose="02020603050405020304" pitchFamily="18" charset="0"/>
